--- a/assets/figures-editable/c3-c4/c3-e13.pptx
+++ b/assets/figures-editable/c3-c4/c3-e13.pptx
@@ -3104,8 +3104,8 @@
         </p:nvSpPr>
         <p:spPr>
           <a:xfrm>
-            <a:off x="274320" y="137160"/>
-            <a:ext cx="11612880" cy="365760"/>
+            <a:off x="274320" y="118872"/>
+            <a:ext cx="11612880" cy="340105"/>
           </a:xfrm>
           <a:prstGeom prst="rect">
             <a:avLst/>
@@ -3114,7 +3114,7 @@
           <a:effectLst/>
         </p:spPr>
         <p:txBody>
-          <a:bodyPr wrap="square" lIns="27432" rIns="27432" tIns="18288" bIns="18288" anchor="ctr">
+          <a:bodyPr wrap="none" lIns="18288" rIns="18288" tIns="18288" bIns="18288" anchor="t">
             <a:spAutoFit/>
           </a:bodyPr>
           <a:lstStyle/>
@@ -3125,7 +3125,7 @@
               </a:spcAft>
             </a:pPr>
             <a:r>
-              <a:rPr sz="2100" b="0" i="0">
+              <a:rPr sz="1900" b="1" i="0">
                 <a:solidFill>
                   <a:srgbClr val="8EDBD4"/>
                 </a:solidFill>
@@ -3138,22 +3138,24 @@
       </p:sp>
       <p:sp>
         <p:nvSpPr>
-          <p:cNvPr id="3" name="C3-E13 rect 1" descr="sci-ppt:o001"/>
+          <p:cNvPr id="3" name="C3-E13 round_rect 1" descr="sci-ppt:o001"/>
           <p:cNvSpPr/>
           <p:nvPr/>
         </p:nvSpPr>
         <p:spPr>
           <a:xfrm>
-            <a:off x="822960" y="1051560"/>
-            <a:ext cx="9875520" cy="2377440"/>
-          </a:xfrm>
-          <a:prstGeom prst="rect">
-            <a:avLst/>
-          </a:prstGeom>
-          <a:noFill/>
-          <a:ln w="19050">
+            <a:off x="365760" y="914400"/>
+            <a:ext cx="6766560" cy="4846320"/>
+          </a:xfrm>
+          <a:prstGeom prst="roundRect">
+            <a:avLst/>
+          </a:prstGeom>
+          <a:solidFill>
+            <a:srgbClr val="1E4A5A"/>
+          </a:solidFill>
+          <a:ln w="17780">
             <a:solidFill>
-              <a:srgbClr val="B4C7D2"/>
+              <a:srgbClr val="2B6678"/>
             </a:solidFill>
           </a:ln>
           <a:effectLst/>
@@ -3168,46 +3170,14 @@
       </p:sp>
       <p:sp>
         <p:nvSpPr>
-          <p:cNvPr id="4" name="C3-E13 ellipse 2" descr="sci-ppt:o002"/>
-          <p:cNvSpPr/>
-          <p:nvPr/>
-        </p:nvSpPr>
-        <p:spPr>
-          <a:xfrm>
-            <a:off x="2194560" y="1600200"/>
-            <a:ext cx="1280160" cy="1280160"/>
-          </a:xfrm>
-          <a:prstGeom prst="ellipse">
-            <a:avLst/>
-          </a:prstGeom>
-          <a:solidFill>
-            <a:srgbClr val="213E4B"/>
-          </a:solidFill>
-          <a:ln w="19050">
-            <a:solidFill>
-              <a:srgbClr val="B4C7D2"/>
-            </a:solidFill>
-          </a:ln>
-          <a:effectLst/>
-        </p:spPr>
-        <p:txBody>
-          <a:bodyPr rtlCol="0" anchor="ctr"/>
-          <a:lstStyle/>
-          <a:p>
-            <a:pPr algn="ctr"/>
-          </a:p>
-        </p:txBody>
-      </p:sp>
-      <p:sp>
-        <p:nvSpPr>
-          <p:cNvPr id="5" name="C3-E13 text 3" descr="sci-ppt:o003"/>
+          <p:cNvPr id="4" name="C3-E13 text 2" descr="sci-ppt:o002"/>
           <p:cNvSpPr txBox="1"/>
           <p:nvPr/>
         </p:nvSpPr>
         <p:spPr>
           <a:xfrm>
-            <a:off x="2423160" y="2057400"/>
-            <a:ext cx="1371600" cy="365760"/>
+            <a:off x="548640" y="1005840"/>
+            <a:ext cx="6400800" cy="262636"/>
           </a:xfrm>
           <a:prstGeom prst="rect">
             <a:avLst/>
@@ -3216,7 +3186,7 @@
           <a:effectLst/>
         </p:spPr>
         <p:txBody>
-          <a:bodyPr wrap="square" lIns="27432" rIns="27432" tIns="18288" bIns="18288" anchor="ctr">
+          <a:bodyPr wrap="none" lIns="18288" rIns="18288" tIns="18288" bIns="18288" anchor="t">
             <a:spAutoFit/>
           </a:bodyPr>
           <a:lstStyle/>
@@ -3227,27 +3197,795 @@
               </a:spcAft>
             </a:pPr>
             <a:r>
-              <a:rPr sz="1700" b="0" i="0">
+              <a:rPr sz="1400" b="1" i="0">
                 <a:solidFill>
                   <a:srgbClr val="E7F0F3"/>
                 </a:solidFill>
                 <a:latin typeface="Arial"/>
               </a:rPr>
-              <a:t>p_g</a:t>
-            </a:r>
-          </a:p>
-        </p:txBody>
-      </p:sp>
-      <p:sp>
-        <p:nvSpPr>
-          <p:cNvPr id="6" name="C3-E13 text 4" descr="sci-ppt:o004"/>
+              <a:t>Liquid region Ω(t):  ∇²φ = 0,  u = ∇φ</a:t>
+            </a:r>
+          </a:p>
+        </p:txBody>
+      </p:sp>
+      <p:sp>
+        <p:nvSpPr>
+          <p:cNvPr id="5" name="C3-E13 rect 3" descr="sci-ppt:o003"/>
+          <p:cNvSpPr/>
+          <p:nvPr/>
+        </p:nvSpPr>
+        <p:spPr>
+          <a:xfrm>
+            <a:off x="822960" y="5120640"/>
+            <a:ext cx="6035040" cy="237744"/>
+          </a:xfrm>
+          <a:prstGeom prst="rect">
+            <a:avLst/>
+          </a:prstGeom>
+          <a:solidFill>
+            <a:srgbClr val="3A5362"/>
+          </a:solidFill>
+          <a:ln w="16510">
+            <a:solidFill>
+              <a:srgbClr val="B4C7D2"/>
+            </a:solidFill>
+          </a:ln>
+          <a:effectLst/>
+        </p:spPr>
+        <p:txBody>
+          <a:bodyPr rtlCol="0" anchor="ctr"/>
+          <a:lstStyle/>
+          <a:p>
+            <a:pPr algn="ctr"/>
+          </a:p>
+        </p:txBody>
+      </p:sp>
+      <p:cxnSp>
+        <p:nvCxnSpPr>
+          <p:cNvPr id="6" name="C3-E13 line 4" descr="sci-ppt:o004"/>
+          <p:cNvCxnSpPr/>
+          <p:nvPr/>
+        </p:nvCxnSpPr>
+        <p:spPr>
+          <a:xfrm>
+            <a:off x="841248" y="5358383"/>
+            <a:ext cx="137160" cy="155448"/>
+          </a:xfrm>
+          <a:prstGeom prst="line">
+            <a:avLst/>
+          </a:prstGeom>
+          <a:ln w="12700">
+            <a:solidFill>
+              <a:srgbClr val="B4C7D2"/>
+            </a:solidFill>
+          </a:ln>
+          <a:effectLst/>
+        </p:spPr>
+      </p:cxnSp>
+      <p:cxnSp>
+        <p:nvCxnSpPr>
+          <p:cNvPr id="7" name="C3-E13 line 5" descr="sci-ppt:o005"/>
+          <p:cNvCxnSpPr/>
+          <p:nvPr/>
+        </p:nvCxnSpPr>
+        <p:spPr>
+          <a:xfrm>
+            <a:off x="1024128" y="5358383"/>
+            <a:ext cx="137160" cy="155448"/>
+          </a:xfrm>
+          <a:prstGeom prst="line">
+            <a:avLst/>
+          </a:prstGeom>
+          <a:ln w="12700">
+            <a:solidFill>
+              <a:srgbClr val="B4C7D2"/>
+            </a:solidFill>
+          </a:ln>
+          <a:effectLst/>
+        </p:spPr>
+      </p:cxnSp>
+      <p:cxnSp>
+        <p:nvCxnSpPr>
+          <p:cNvPr id="8" name="C3-E13 line 6" descr="sci-ppt:o006"/>
+          <p:cNvCxnSpPr/>
+          <p:nvPr/>
+        </p:nvCxnSpPr>
+        <p:spPr>
+          <a:xfrm>
+            <a:off x="1207008" y="5358383"/>
+            <a:ext cx="137160" cy="155448"/>
+          </a:xfrm>
+          <a:prstGeom prst="line">
+            <a:avLst/>
+          </a:prstGeom>
+          <a:ln w="12700">
+            <a:solidFill>
+              <a:srgbClr val="B4C7D2"/>
+            </a:solidFill>
+          </a:ln>
+          <a:effectLst/>
+        </p:spPr>
+      </p:cxnSp>
+      <p:cxnSp>
+        <p:nvCxnSpPr>
+          <p:cNvPr id="9" name="C3-E13 line 7" descr="sci-ppt:o007"/>
+          <p:cNvCxnSpPr/>
+          <p:nvPr/>
+        </p:nvCxnSpPr>
+        <p:spPr>
+          <a:xfrm>
+            <a:off x="1389888" y="5358383"/>
+            <a:ext cx="137160" cy="155448"/>
+          </a:xfrm>
+          <a:prstGeom prst="line">
+            <a:avLst/>
+          </a:prstGeom>
+          <a:ln w="12700">
+            <a:solidFill>
+              <a:srgbClr val="B4C7D2"/>
+            </a:solidFill>
+          </a:ln>
+          <a:effectLst/>
+        </p:spPr>
+      </p:cxnSp>
+      <p:cxnSp>
+        <p:nvCxnSpPr>
+          <p:cNvPr id="10" name="C3-E13 line 8" descr="sci-ppt:o008"/>
+          <p:cNvCxnSpPr/>
+          <p:nvPr/>
+        </p:nvCxnSpPr>
+        <p:spPr>
+          <a:xfrm>
+            <a:off x="1572768" y="5358383"/>
+            <a:ext cx="137160" cy="155448"/>
+          </a:xfrm>
+          <a:prstGeom prst="line">
+            <a:avLst/>
+          </a:prstGeom>
+          <a:ln w="12700">
+            <a:solidFill>
+              <a:srgbClr val="B4C7D2"/>
+            </a:solidFill>
+          </a:ln>
+          <a:effectLst/>
+        </p:spPr>
+      </p:cxnSp>
+      <p:cxnSp>
+        <p:nvCxnSpPr>
+          <p:cNvPr id="11" name="C3-E13 line 9" descr="sci-ppt:o009"/>
+          <p:cNvCxnSpPr/>
+          <p:nvPr/>
+        </p:nvCxnSpPr>
+        <p:spPr>
+          <a:xfrm>
+            <a:off x="1755648" y="5358383"/>
+            <a:ext cx="137159" cy="155448"/>
+          </a:xfrm>
+          <a:prstGeom prst="line">
+            <a:avLst/>
+          </a:prstGeom>
+          <a:ln w="12700">
+            <a:solidFill>
+              <a:srgbClr val="B4C7D2"/>
+            </a:solidFill>
+          </a:ln>
+          <a:effectLst/>
+        </p:spPr>
+      </p:cxnSp>
+      <p:cxnSp>
+        <p:nvCxnSpPr>
+          <p:cNvPr id="12" name="C3-E13 line 10" descr="sci-ppt:o010"/>
+          <p:cNvCxnSpPr/>
+          <p:nvPr/>
+        </p:nvCxnSpPr>
+        <p:spPr>
+          <a:xfrm>
+            <a:off x="1938528" y="5358383"/>
+            <a:ext cx="137160" cy="155448"/>
+          </a:xfrm>
+          <a:prstGeom prst="line">
+            <a:avLst/>
+          </a:prstGeom>
+          <a:ln w="12700">
+            <a:solidFill>
+              <a:srgbClr val="B4C7D2"/>
+            </a:solidFill>
+          </a:ln>
+          <a:effectLst/>
+        </p:spPr>
+      </p:cxnSp>
+      <p:cxnSp>
+        <p:nvCxnSpPr>
+          <p:cNvPr id="13" name="C3-E13 line 11" descr="sci-ppt:o011"/>
+          <p:cNvCxnSpPr/>
+          <p:nvPr/>
+        </p:nvCxnSpPr>
+        <p:spPr>
+          <a:xfrm>
+            <a:off x="2121408" y="5358383"/>
+            <a:ext cx="137160" cy="155448"/>
+          </a:xfrm>
+          <a:prstGeom prst="line">
+            <a:avLst/>
+          </a:prstGeom>
+          <a:ln w="12700">
+            <a:solidFill>
+              <a:srgbClr val="B4C7D2"/>
+            </a:solidFill>
+          </a:ln>
+          <a:effectLst/>
+        </p:spPr>
+      </p:cxnSp>
+      <p:cxnSp>
+        <p:nvCxnSpPr>
+          <p:cNvPr id="14" name="C3-E13 line 12" descr="sci-ppt:o012"/>
+          <p:cNvCxnSpPr/>
+          <p:nvPr/>
+        </p:nvCxnSpPr>
+        <p:spPr>
+          <a:xfrm>
+            <a:off x="2304288" y="5358383"/>
+            <a:ext cx="137160" cy="155448"/>
+          </a:xfrm>
+          <a:prstGeom prst="line">
+            <a:avLst/>
+          </a:prstGeom>
+          <a:ln w="12700">
+            <a:solidFill>
+              <a:srgbClr val="B4C7D2"/>
+            </a:solidFill>
+          </a:ln>
+          <a:effectLst/>
+        </p:spPr>
+      </p:cxnSp>
+      <p:cxnSp>
+        <p:nvCxnSpPr>
+          <p:cNvPr id="15" name="C3-E13 line 13" descr="sci-ppt:o013"/>
+          <p:cNvCxnSpPr/>
+          <p:nvPr/>
+        </p:nvCxnSpPr>
+        <p:spPr>
+          <a:xfrm>
+            <a:off x="2487168" y="5358383"/>
+            <a:ext cx="137160" cy="155448"/>
+          </a:xfrm>
+          <a:prstGeom prst="line">
+            <a:avLst/>
+          </a:prstGeom>
+          <a:ln w="12700">
+            <a:solidFill>
+              <a:srgbClr val="B4C7D2"/>
+            </a:solidFill>
+          </a:ln>
+          <a:effectLst/>
+        </p:spPr>
+      </p:cxnSp>
+      <p:cxnSp>
+        <p:nvCxnSpPr>
+          <p:cNvPr id="16" name="C3-E13 line 14" descr="sci-ppt:o014"/>
+          <p:cNvCxnSpPr/>
+          <p:nvPr/>
+        </p:nvCxnSpPr>
+        <p:spPr>
+          <a:xfrm>
+            <a:off x="2670048" y="5358383"/>
+            <a:ext cx="137160" cy="155448"/>
+          </a:xfrm>
+          <a:prstGeom prst="line">
+            <a:avLst/>
+          </a:prstGeom>
+          <a:ln w="12700">
+            <a:solidFill>
+              <a:srgbClr val="B4C7D2"/>
+            </a:solidFill>
+          </a:ln>
+          <a:effectLst/>
+        </p:spPr>
+      </p:cxnSp>
+      <p:cxnSp>
+        <p:nvCxnSpPr>
+          <p:cNvPr id="17" name="C3-E13 line 15" descr="sci-ppt:o015"/>
+          <p:cNvCxnSpPr/>
+          <p:nvPr/>
+        </p:nvCxnSpPr>
+        <p:spPr>
+          <a:xfrm>
+            <a:off x="2852928" y="5358383"/>
+            <a:ext cx="137160" cy="155448"/>
+          </a:xfrm>
+          <a:prstGeom prst="line">
+            <a:avLst/>
+          </a:prstGeom>
+          <a:ln w="12700">
+            <a:solidFill>
+              <a:srgbClr val="B4C7D2"/>
+            </a:solidFill>
+          </a:ln>
+          <a:effectLst/>
+        </p:spPr>
+      </p:cxnSp>
+      <p:cxnSp>
+        <p:nvCxnSpPr>
+          <p:cNvPr id="18" name="C3-E13 line 16" descr="sci-ppt:o016"/>
+          <p:cNvCxnSpPr/>
+          <p:nvPr/>
+        </p:nvCxnSpPr>
+        <p:spPr>
+          <a:xfrm>
+            <a:off x="3035808" y="5358383"/>
+            <a:ext cx="137160" cy="155448"/>
+          </a:xfrm>
+          <a:prstGeom prst="line">
+            <a:avLst/>
+          </a:prstGeom>
+          <a:ln w="12700">
+            <a:solidFill>
+              <a:srgbClr val="B4C7D2"/>
+            </a:solidFill>
+          </a:ln>
+          <a:effectLst/>
+        </p:spPr>
+      </p:cxnSp>
+      <p:cxnSp>
+        <p:nvCxnSpPr>
+          <p:cNvPr id="19" name="C3-E13 line 17" descr="sci-ppt:o017"/>
+          <p:cNvCxnSpPr/>
+          <p:nvPr/>
+        </p:nvCxnSpPr>
+        <p:spPr>
+          <a:xfrm>
+            <a:off x="3218688" y="5358383"/>
+            <a:ext cx="137160" cy="155448"/>
+          </a:xfrm>
+          <a:prstGeom prst="line">
+            <a:avLst/>
+          </a:prstGeom>
+          <a:ln w="12700">
+            <a:solidFill>
+              <a:srgbClr val="B4C7D2"/>
+            </a:solidFill>
+          </a:ln>
+          <a:effectLst/>
+        </p:spPr>
+      </p:cxnSp>
+      <p:cxnSp>
+        <p:nvCxnSpPr>
+          <p:cNvPr id="20" name="C3-E13 line 18" descr="sci-ppt:o018"/>
+          <p:cNvCxnSpPr/>
+          <p:nvPr/>
+        </p:nvCxnSpPr>
+        <p:spPr>
+          <a:xfrm>
+            <a:off x="3401568" y="5358383"/>
+            <a:ext cx="137160" cy="155448"/>
+          </a:xfrm>
+          <a:prstGeom prst="line">
+            <a:avLst/>
+          </a:prstGeom>
+          <a:ln w="12700">
+            <a:solidFill>
+              <a:srgbClr val="B4C7D2"/>
+            </a:solidFill>
+          </a:ln>
+          <a:effectLst/>
+        </p:spPr>
+      </p:cxnSp>
+      <p:cxnSp>
+        <p:nvCxnSpPr>
+          <p:cNvPr id="21" name="C3-E13 line 19" descr="sci-ppt:o019"/>
+          <p:cNvCxnSpPr/>
+          <p:nvPr/>
+        </p:nvCxnSpPr>
+        <p:spPr>
+          <a:xfrm>
+            <a:off x="3584448" y="5358383"/>
+            <a:ext cx="137160" cy="155448"/>
+          </a:xfrm>
+          <a:prstGeom prst="line">
+            <a:avLst/>
+          </a:prstGeom>
+          <a:ln w="12700">
+            <a:solidFill>
+              <a:srgbClr val="B4C7D2"/>
+            </a:solidFill>
+          </a:ln>
+          <a:effectLst/>
+        </p:spPr>
+      </p:cxnSp>
+      <p:cxnSp>
+        <p:nvCxnSpPr>
+          <p:cNvPr id="22" name="C3-E13 line 20" descr="sci-ppt:o020"/>
+          <p:cNvCxnSpPr/>
+          <p:nvPr/>
+        </p:nvCxnSpPr>
+        <p:spPr>
+          <a:xfrm>
+            <a:off x="3767328" y="5358383"/>
+            <a:ext cx="137160" cy="155448"/>
+          </a:xfrm>
+          <a:prstGeom prst="line">
+            <a:avLst/>
+          </a:prstGeom>
+          <a:ln w="12700">
+            <a:solidFill>
+              <a:srgbClr val="B4C7D2"/>
+            </a:solidFill>
+          </a:ln>
+          <a:effectLst/>
+        </p:spPr>
+      </p:cxnSp>
+      <p:cxnSp>
+        <p:nvCxnSpPr>
+          <p:cNvPr id="23" name="C3-E13 line 21" descr="sci-ppt:o021"/>
+          <p:cNvCxnSpPr/>
+          <p:nvPr/>
+        </p:nvCxnSpPr>
+        <p:spPr>
+          <a:xfrm>
+            <a:off x="3950208" y="5358383"/>
+            <a:ext cx="137160" cy="155448"/>
+          </a:xfrm>
+          <a:prstGeom prst="line">
+            <a:avLst/>
+          </a:prstGeom>
+          <a:ln w="12700">
+            <a:solidFill>
+              <a:srgbClr val="B4C7D2"/>
+            </a:solidFill>
+          </a:ln>
+          <a:effectLst/>
+        </p:spPr>
+      </p:cxnSp>
+      <p:cxnSp>
+        <p:nvCxnSpPr>
+          <p:cNvPr id="24" name="C3-E13 line 22" descr="sci-ppt:o022"/>
+          <p:cNvCxnSpPr/>
+          <p:nvPr/>
+        </p:nvCxnSpPr>
+        <p:spPr>
+          <a:xfrm>
+            <a:off x="4133087" y="5358383"/>
+            <a:ext cx="137161" cy="155448"/>
+          </a:xfrm>
+          <a:prstGeom prst="line">
+            <a:avLst/>
+          </a:prstGeom>
+          <a:ln w="12700">
+            <a:solidFill>
+              <a:srgbClr val="B4C7D2"/>
+            </a:solidFill>
+          </a:ln>
+          <a:effectLst/>
+        </p:spPr>
+      </p:cxnSp>
+      <p:cxnSp>
+        <p:nvCxnSpPr>
+          <p:cNvPr id="25" name="C3-E13 line 23" descr="sci-ppt:o023"/>
+          <p:cNvCxnSpPr/>
+          <p:nvPr/>
+        </p:nvCxnSpPr>
+        <p:spPr>
+          <a:xfrm>
+            <a:off x="4315968" y="5358383"/>
+            <a:ext cx="137160" cy="155448"/>
+          </a:xfrm>
+          <a:prstGeom prst="line">
+            <a:avLst/>
+          </a:prstGeom>
+          <a:ln w="12700">
+            <a:solidFill>
+              <a:srgbClr val="B4C7D2"/>
+            </a:solidFill>
+          </a:ln>
+          <a:effectLst/>
+        </p:spPr>
+      </p:cxnSp>
+      <p:cxnSp>
+        <p:nvCxnSpPr>
+          <p:cNvPr id="26" name="C3-E13 line 24" descr="sci-ppt:o024"/>
+          <p:cNvCxnSpPr/>
+          <p:nvPr/>
+        </p:nvCxnSpPr>
+        <p:spPr>
+          <a:xfrm>
+            <a:off x="4498848" y="5358383"/>
+            <a:ext cx="137160" cy="155448"/>
+          </a:xfrm>
+          <a:prstGeom prst="line">
+            <a:avLst/>
+          </a:prstGeom>
+          <a:ln w="12700">
+            <a:solidFill>
+              <a:srgbClr val="B4C7D2"/>
+            </a:solidFill>
+          </a:ln>
+          <a:effectLst/>
+        </p:spPr>
+      </p:cxnSp>
+      <p:cxnSp>
+        <p:nvCxnSpPr>
+          <p:cNvPr id="27" name="C3-E13 line 25" descr="sci-ppt:o025"/>
+          <p:cNvCxnSpPr/>
+          <p:nvPr/>
+        </p:nvCxnSpPr>
+        <p:spPr>
+          <a:xfrm>
+            <a:off x="4681728" y="5358383"/>
+            <a:ext cx="137160" cy="155448"/>
+          </a:xfrm>
+          <a:prstGeom prst="line">
+            <a:avLst/>
+          </a:prstGeom>
+          <a:ln w="12700">
+            <a:solidFill>
+              <a:srgbClr val="B4C7D2"/>
+            </a:solidFill>
+          </a:ln>
+          <a:effectLst/>
+        </p:spPr>
+      </p:cxnSp>
+      <p:cxnSp>
+        <p:nvCxnSpPr>
+          <p:cNvPr id="28" name="C3-E13 line 26" descr="sci-ppt:o026"/>
+          <p:cNvCxnSpPr/>
+          <p:nvPr/>
+        </p:nvCxnSpPr>
+        <p:spPr>
+          <a:xfrm>
+            <a:off x="4864608" y="5358383"/>
+            <a:ext cx="137160" cy="155448"/>
+          </a:xfrm>
+          <a:prstGeom prst="line">
+            <a:avLst/>
+          </a:prstGeom>
+          <a:ln w="12700">
+            <a:solidFill>
+              <a:srgbClr val="B4C7D2"/>
+            </a:solidFill>
+          </a:ln>
+          <a:effectLst/>
+        </p:spPr>
+      </p:cxnSp>
+      <p:cxnSp>
+        <p:nvCxnSpPr>
+          <p:cNvPr id="29" name="C3-E13 line 27" descr="sci-ppt:o027"/>
+          <p:cNvCxnSpPr/>
+          <p:nvPr/>
+        </p:nvCxnSpPr>
+        <p:spPr>
+          <a:xfrm>
+            <a:off x="5047488" y="5358383"/>
+            <a:ext cx="137160" cy="155448"/>
+          </a:xfrm>
+          <a:prstGeom prst="line">
+            <a:avLst/>
+          </a:prstGeom>
+          <a:ln w="12700">
+            <a:solidFill>
+              <a:srgbClr val="B4C7D2"/>
+            </a:solidFill>
+          </a:ln>
+          <a:effectLst/>
+        </p:spPr>
+      </p:cxnSp>
+      <p:cxnSp>
+        <p:nvCxnSpPr>
+          <p:cNvPr id="30" name="C3-E13 line 28" descr="sci-ppt:o028"/>
+          <p:cNvCxnSpPr/>
+          <p:nvPr/>
+        </p:nvCxnSpPr>
+        <p:spPr>
+          <a:xfrm>
+            <a:off x="5230368" y="5358383"/>
+            <a:ext cx="137160" cy="155448"/>
+          </a:xfrm>
+          <a:prstGeom prst="line">
+            <a:avLst/>
+          </a:prstGeom>
+          <a:ln w="12700">
+            <a:solidFill>
+              <a:srgbClr val="B4C7D2"/>
+            </a:solidFill>
+          </a:ln>
+          <a:effectLst/>
+        </p:spPr>
+      </p:cxnSp>
+      <p:cxnSp>
+        <p:nvCxnSpPr>
+          <p:cNvPr id="31" name="C3-E13 line 29" descr="sci-ppt:o029"/>
+          <p:cNvCxnSpPr/>
+          <p:nvPr/>
+        </p:nvCxnSpPr>
+        <p:spPr>
+          <a:xfrm>
+            <a:off x="5413248" y="5358383"/>
+            <a:ext cx="137160" cy="155448"/>
+          </a:xfrm>
+          <a:prstGeom prst="line">
+            <a:avLst/>
+          </a:prstGeom>
+          <a:ln w="12700">
+            <a:solidFill>
+              <a:srgbClr val="B4C7D2"/>
+            </a:solidFill>
+          </a:ln>
+          <a:effectLst/>
+        </p:spPr>
+      </p:cxnSp>
+      <p:cxnSp>
+        <p:nvCxnSpPr>
+          <p:cNvPr id="32" name="C3-E13 line 30" descr="sci-ppt:o030"/>
+          <p:cNvCxnSpPr/>
+          <p:nvPr/>
+        </p:nvCxnSpPr>
+        <p:spPr>
+          <a:xfrm>
+            <a:off x="5596128" y="5358383"/>
+            <a:ext cx="137160" cy="155448"/>
+          </a:xfrm>
+          <a:prstGeom prst="line">
+            <a:avLst/>
+          </a:prstGeom>
+          <a:ln w="12700">
+            <a:solidFill>
+              <a:srgbClr val="B4C7D2"/>
+            </a:solidFill>
+          </a:ln>
+          <a:effectLst/>
+        </p:spPr>
+      </p:cxnSp>
+      <p:cxnSp>
+        <p:nvCxnSpPr>
+          <p:cNvPr id="33" name="C3-E13 line 31" descr="sci-ppt:o031"/>
+          <p:cNvCxnSpPr/>
+          <p:nvPr/>
+        </p:nvCxnSpPr>
+        <p:spPr>
+          <a:xfrm>
+            <a:off x="5779008" y="5358383"/>
+            <a:ext cx="137160" cy="155448"/>
+          </a:xfrm>
+          <a:prstGeom prst="line">
+            <a:avLst/>
+          </a:prstGeom>
+          <a:ln w="12700">
+            <a:solidFill>
+              <a:srgbClr val="B4C7D2"/>
+            </a:solidFill>
+          </a:ln>
+          <a:effectLst/>
+        </p:spPr>
+      </p:cxnSp>
+      <p:cxnSp>
+        <p:nvCxnSpPr>
+          <p:cNvPr id="34" name="C3-E13 line 32" descr="sci-ppt:o032"/>
+          <p:cNvCxnSpPr/>
+          <p:nvPr/>
+        </p:nvCxnSpPr>
+        <p:spPr>
+          <a:xfrm>
+            <a:off x="5961888" y="5358383"/>
+            <a:ext cx="137160" cy="155448"/>
+          </a:xfrm>
+          <a:prstGeom prst="line">
+            <a:avLst/>
+          </a:prstGeom>
+          <a:ln w="12700">
+            <a:solidFill>
+              <a:srgbClr val="B4C7D2"/>
+            </a:solidFill>
+          </a:ln>
+          <a:effectLst/>
+        </p:spPr>
+      </p:cxnSp>
+      <p:cxnSp>
+        <p:nvCxnSpPr>
+          <p:cNvPr id="35" name="C3-E13 line 33" descr="sci-ppt:o033"/>
+          <p:cNvCxnSpPr/>
+          <p:nvPr/>
+        </p:nvCxnSpPr>
+        <p:spPr>
+          <a:xfrm>
+            <a:off x="6144768" y="5358383"/>
+            <a:ext cx="137160" cy="155448"/>
+          </a:xfrm>
+          <a:prstGeom prst="line">
+            <a:avLst/>
+          </a:prstGeom>
+          <a:ln w="12700">
+            <a:solidFill>
+              <a:srgbClr val="B4C7D2"/>
+            </a:solidFill>
+          </a:ln>
+          <a:effectLst/>
+        </p:spPr>
+      </p:cxnSp>
+      <p:cxnSp>
+        <p:nvCxnSpPr>
+          <p:cNvPr id="36" name="C3-E13 line 34" descr="sci-ppt:o034"/>
+          <p:cNvCxnSpPr/>
+          <p:nvPr/>
+        </p:nvCxnSpPr>
+        <p:spPr>
+          <a:xfrm>
+            <a:off x="6327648" y="5358383"/>
+            <a:ext cx="137160" cy="155448"/>
+          </a:xfrm>
+          <a:prstGeom prst="line">
+            <a:avLst/>
+          </a:prstGeom>
+          <a:ln w="12700">
+            <a:solidFill>
+              <a:srgbClr val="B4C7D2"/>
+            </a:solidFill>
+          </a:ln>
+          <a:effectLst/>
+        </p:spPr>
+      </p:cxnSp>
+      <p:cxnSp>
+        <p:nvCxnSpPr>
+          <p:cNvPr id="37" name="C3-E13 line 35" descr="sci-ppt:o035"/>
+          <p:cNvCxnSpPr/>
+          <p:nvPr/>
+        </p:nvCxnSpPr>
+        <p:spPr>
+          <a:xfrm>
+            <a:off x="6510528" y="5358383"/>
+            <a:ext cx="137160" cy="155448"/>
+          </a:xfrm>
+          <a:prstGeom prst="line">
+            <a:avLst/>
+          </a:prstGeom>
+          <a:ln w="12700">
+            <a:solidFill>
+              <a:srgbClr val="B4C7D2"/>
+            </a:solidFill>
+          </a:ln>
+          <a:effectLst/>
+        </p:spPr>
+      </p:cxnSp>
+      <p:sp>
+        <p:nvSpPr>
+          <p:cNvPr id="38" name="C3-E13 ellipse 36" descr="sci-ppt:o036"/>
+          <p:cNvSpPr/>
+          <p:nvPr/>
+        </p:nvSpPr>
+        <p:spPr>
+          <a:xfrm>
+            <a:off x="1828800" y="2651760"/>
+            <a:ext cx="1828800" cy="1828800"/>
+          </a:xfrm>
+          <a:prstGeom prst="ellipse">
+            <a:avLst/>
+          </a:prstGeom>
+          <a:solidFill>
+            <a:srgbClr val="0C1820"/>
+          </a:solidFill>
+          <a:ln w="27940">
+            <a:solidFill>
+              <a:srgbClr val="F2B880"/>
+            </a:solidFill>
+          </a:ln>
+          <a:effectLst/>
+        </p:spPr>
+        <p:txBody>
+          <a:bodyPr rtlCol="0" anchor="ctr"/>
+          <a:lstStyle/>
+          <a:p>
+            <a:pPr algn="ctr"/>
+          </a:p>
+        </p:txBody>
+      </p:sp>
+      <p:sp>
+        <p:nvSpPr>
+          <p:cNvPr id="39" name="C3-E13 text 37" descr="sci-ppt:o037"/>
           <p:cNvSpPr txBox="1"/>
           <p:nvPr/>
         </p:nvSpPr>
         <p:spPr>
           <a:xfrm>
-            <a:off x="4663440" y="1874519"/>
-            <a:ext cx="4297680" cy="548640"/>
+            <a:off x="2103120" y="3429000"/>
+            <a:ext cx="1280160" cy="239395"/>
           </a:xfrm>
           <a:prstGeom prst="rect">
             <a:avLst/>
@@ -3256,7 +3994,47 @@
           <a:effectLst/>
         </p:spPr>
         <p:txBody>
-          <a:bodyPr wrap="square" lIns="27432" rIns="27432" tIns="18288" bIns="18288" anchor="ctr">
+          <a:bodyPr wrap="none" lIns="18288" rIns="18288" tIns="18288" bIns="18288" anchor="t">
+            <a:spAutoFit/>
+          </a:bodyPr>
+          <a:lstStyle/>
+          <a:p>
+            <a:pPr algn="ctr">
+              <a:spcAft>
+                <a:spcPts val="0"/>
+              </a:spcAft>
+            </a:pPr>
+            <a:r>
+              <a:rPr sz="1250" b="0" i="0">
+                <a:solidFill>
+                  <a:srgbClr val="B4C7D2"/>
+                </a:solidFill>
+                <a:latin typeface="Arial"/>
+              </a:rPr>
+              <a:t>gas</a:t>
+            </a:r>
+          </a:p>
+        </p:txBody>
+      </p:sp>
+      <p:sp>
+        <p:nvSpPr>
+          <p:cNvPr id="40" name="C3-E13 text 38" descr="sci-ppt:o038"/>
+          <p:cNvSpPr txBox="1"/>
+          <p:nvPr/>
+        </p:nvSpPr>
+        <p:spPr>
+          <a:xfrm>
+            <a:off x="914400" y="1554480"/>
+            <a:ext cx="3291840" cy="231648"/>
+          </a:xfrm>
+          <a:prstGeom prst="rect">
+            <a:avLst/>
+          </a:prstGeom>
+          <a:noFill/>
+          <a:effectLst/>
+        </p:spPr>
+        <p:txBody>
+          <a:bodyPr wrap="none" lIns="18288" rIns="18288" tIns="18288" bIns="18288" anchor="t">
             <a:spAutoFit/>
           </a:bodyPr>
           <a:lstStyle/>
@@ -3267,27 +4045,107 @@
               </a:spcAft>
             </a:pPr>
             <a:r>
-              <a:rPr sz="1900" b="0" i="0">
+              <a:rPr sz="1200" b="1" i="0">
                 <a:solidFill>
-                  <a:srgbClr val="E7F0F3"/>
+                  <a:srgbClr val="F2B880"/>
                 </a:solidFill>
                 <a:latin typeface="Arial"/>
               </a:rPr>
-              <a:t>Liquid Ω(t): u = ∇φ</a:t>
+              <a:t>interface Γ(t)</a:t>
+            </a:r>
+          </a:p>
+        </p:txBody>
+      </p:sp>
+      <p:sp>
+        <p:nvSpPr>
+          <p:cNvPr id="41" name="C3-E13 text 39" descr="sci-ppt:o039"/>
+          <p:cNvSpPr txBox="1"/>
+          <p:nvPr/>
+        </p:nvSpPr>
+        <p:spPr>
+          <a:xfrm>
+            <a:off x="4846320" y="3200400"/>
+            <a:ext cx="2103120" cy="231648"/>
+          </a:xfrm>
+          <a:prstGeom prst="rect">
+            <a:avLst/>
+          </a:prstGeom>
+          <a:noFill/>
+          <a:effectLst/>
+        </p:spPr>
+        <p:txBody>
+          <a:bodyPr wrap="none" lIns="18288" rIns="18288" tIns="18288" bIns="18288" anchor="t">
+            <a:spAutoFit/>
+          </a:bodyPr>
+          <a:lstStyle/>
+          <a:p>
+            <a:pPr algn="l">
+              <a:spcAft>
+                <a:spcPts val="0"/>
+              </a:spcAft>
+            </a:pPr>
+            <a:r>
+              <a:rPr sz="1200" b="1" i="0">
+                <a:solidFill>
+                  <a:srgbClr val="B4C7D2"/>
+                </a:solidFill>
+                <a:latin typeface="Arial"/>
+              </a:rPr>
+              <a:t>wall</a:t>
+            </a:r>
+          </a:p>
+        </p:txBody>
+      </p:sp>
+      <p:sp>
+        <p:nvSpPr>
+          <p:cNvPr id="42" name="C3-E13 text 40" descr="sci-ppt:o040"/>
+          <p:cNvSpPr txBox="1"/>
+          <p:nvPr/>
+        </p:nvSpPr>
+        <p:spPr>
+          <a:xfrm>
+            <a:off x="4572000" y="1645920"/>
+            <a:ext cx="2468880" cy="231648"/>
+          </a:xfrm>
+          <a:prstGeom prst="rect">
+            <a:avLst/>
+          </a:prstGeom>
+          <a:noFill/>
+          <a:effectLst/>
+        </p:spPr>
+        <p:txBody>
+          <a:bodyPr wrap="none" lIns="18288" rIns="18288" tIns="18288" bIns="18288" anchor="t">
+            <a:spAutoFit/>
+          </a:bodyPr>
+          <a:lstStyle/>
+          <a:p>
+            <a:pPr algn="l">
+              <a:spcAft>
+                <a:spcPts val="0"/>
+              </a:spcAft>
+            </a:pPr>
+            <a:r>
+              <a:rPr sz="1200" b="1" i="0">
+                <a:solidFill>
+                  <a:srgbClr val="8EDBD4"/>
+                </a:solidFill>
+                <a:latin typeface="Arial"/>
+              </a:rPr>
+              <a:t>far field φ → 0</a:t>
             </a:r>
           </a:p>
         </p:txBody>
       </p:sp>
       <p:cxnSp>
         <p:nvCxnSpPr>
-          <p:cNvPr id="7" name="C3-E13 arrow 5" descr="sci-ppt:o005"/>
+          <p:cNvPr id="43" name="C3-E13 arrow 41" descr="sci-ppt:o041"/>
           <p:cNvCxnSpPr/>
           <p:nvPr/>
         </p:nvCxnSpPr>
         <p:spPr>
-          <a:xfrm flipH="1">
-            <a:off x="3520440" y="2240280"/>
-            <a:ext cx="502920" cy="0"/>
+          <a:xfrm flipV="1">
+            <a:off x="3688380" y="3034496"/>
+            <a:ext cx="515553" cy="187646"/>
           </a:xfrm>
           <a:prstGeom prst="line">
             <a:avLst/>
@@ -3302,56 +4160,16 @@
           <a:effectLst/>
         </p:spPr>
       </p:cxnSp>
-      <p:sp>
-        <p:nvSpPr>
-          <p:cNvPr id="8" name="C3-E13 text 6" descr="sci-ppt:o006"/>
-          <p:cNvSpPr txBox="1"/>
-          <p:nvPr/>
-        </p:nvSpPr>
-        <p:spPr>
-          <a:xfrm>
-            <a:off x="3657600" y="2606040"/>
-            <a:ext cx="4572000" cy="365760"/>
-          </a:xfrm>
-          <a:prstGeom prst="rect">
-            <a:avLst/>
-          </a:prstGeom>
-          <a:noFill/>
-          <a:effectLst/>
-        </p:spPr>
-        <p:txBody>
-          <a:bodyPr wrap="square" lIns="27432" rIns="27432" tIns="18288" bIns="18288" anchor="ctr">
-            <a:spAutoFit/>
-          </a:bodyPr>
-          <a:lstStyle/>
-          <a:p>
-            <a:pPr algn="l">
-              <a:spcAft>
-                <a:spcPts val="0"/>
-              </a:spcAft>
-            </a:pPr>
-            <a:r>
-              <a:rPr sz="1600" b="0" i="0">
-                <a:solidFill>
-                  <a:srgbClr val="E7F0F3"/>
-                </a:solidFill>
-                <a:latin typeface="Arial"/>
-              </a:rPr>
-              <a:t>n: liquid → cavity gas</a:t>
-            </a:r>
-          </a:p>
-        </p:txBody>
-      </p:sp>
       <p:cxnSp>
         <p:nvCxnSpPr>
-          <p:cNvPr id="9" name="C3-E13 arrow 7" descr="sci-ppt:o007"/>
+          <p:cNvPr id="44" name="C3-E13 arrow 42" descr="sci-ppt:o042"/>
           <p:cNvCxnSpPr/>
           <p:nvPr/>
         </p:nvCxnSpPr>
         <p:spPr>
-          <a:xfrm>
-            <a:off x="8778240" y="2011680"/>
-            <a:ext cx="822960" cy="0"/>
+          <a:xfrm flipV="1">
+            <a:off x="3003530" y="2064647"/>
+            <a:ext cx="141999" cy="529946"/>
           </a:xfrm>
           <a:prstGeom prst="line">
             <a:avLst/>
@@ -3366,16 +4184,120 @@
           <a:effectLst/>
         </p:spPr>
       </p:cxnSp>
-      <p:sp>
-        <p:nvSpPr>
-          <p:cNvPr id="10" name="C3-E13 text 8" descr="sci-ppt:o008"/>
+      <p:cxnSp>
+        <p:nvCxnSpPr>
+          <p:cNvPr id="45" name="C3-E13 arrow 43" descr="sci-ppt:o043"/>
+          <p:cNvCxnSpPr/>
+          <p:nvPr/>
+        </p:nvCxnSpPr>
+        <p:spPr>
+          <a:xfrm flipH="1" flipV="1">
+            <a:off x="1743999" y="2375359"/>
+            <a:ext cx="352659" cy="420282"/>
+          </a:xfrm>
+          <a:prstGeom prst="line">
+            <a:avLst/>
+          </a:prstGeom>
+          <a:ln w="25400">
+            <a:solidFill>
+              <a:srgbClr val="8EDBD4"/>
+            </a:solidFill>
+            <a:headEnd type="none" w="med" len="med"/>
+            <a:tailEnd type="triangle" w="med" len="med"/>
+          </a:ln>
+          <a:effectLst/>
+        </p:spPr>
+      </p:cxnSp>
+      <p:cxnSp>
+        <p:nvCxnSpPr>
+          <p:cNvPr id="46" name="C3-E13 arrow 44" descr="sci-ppt:o044"/>
+          <p:cNvCxnSpPr/>
+          <p:nvPr/>
+        </p:nvCxnSpPr>
+        <p:spPr>
+          <a:xfrm flipH="1">
+            <a:off x="1194635" y="3653824"/>
+            <a:ext cx="546552" cy="47817"/>
+          </a:xfrm>
+          <a:prstGeom prst="line">
+            <a:avLst/>
+          </a:prstGeom>
+          <a:ln w="25400">
+            <a:solidFill>
+              <a:srgbClr val="8EDBD4"/>
+            </a:solidFill>
+            <a:headEnd type="none" w="med" len="med"/>
+            <a:tailEnd type="triangle" w="med" len="med"/>
+          </a:ln>
+          <a:effectLst/>
+        </p:spPr>
+      </p:cxnSp>
+      <p:cxnSp>
+        <p:nvCxnSpPr>
+          <p:cNvPr id="47" name="C3-E13 arrow 45" descr="sci-ppt:o045"/>
+          <p:cNvCxnSpPr/>
+          <p:nvPr/>
+        </p:nvCxnSpPr>
+        <p:spPr>
+          <a:xfrm>
+            <a:off x="3614282" y="4069080"/>
+            <a:ext cx="475137" cy="274320"/>
+          </a:xfrm>
+          <a:prstGeom prst="line">
+            <a:avLst/>
+          </a:prstGeom>
+          <a:ln w="25400">
+            <a:solidFill>
+              <a:srgbClr val="8EDBD4"/>
+            </a:solidFill>
+            <a:headEnd type="none" w="med" len="med"/>
+            <a:tailEnd type="triangle" w="med" len="med"/>
+          </a:ln>
+          <a:effectLst/>
+        </p:spPr>
+      </p:cxnSp>
+      <p:sp>
+        <p:nvSpPr>
+          <p:cNvPr id="48" name="C3-E13 round_rect 46" descr="sci-ppt:o046"/>
+          <p:cNvSpPr/>
+          <p:nvPr/>
+        </p:nvSpPr>
+        <p:spPr>
+          <a:xfrm>
+            <a:off x="7406640" y="914400"/>
+            <a:ext cx="4434840" cy="4846320"/>
+          </a:xfrm>
+          <a:prstGeom prst="roundRect">
+            <a:avLst/>
+          </a:prstGeom>
+          <a:solidFill>
+            <a:srgbClr val="213E4B"/>
+          </a:solidFill>
+          <a:ln w="20320">
+            <a:solidFill>
+              <a:srgbClr val="8EDBD4"/>
+            </a:solidFill>
+          </a:ln>
+          <a:effectLst/>
+        </p:spPr>
+        <p:txBody>
+          <a:bodyPr rtlCol="0" anchor="ctr"/>
+          <a:lstStyle/>
+          <a:p>
+            <a:pPr algn="ctr"/>
+          </a:p>
+        </p:txBody>
+      </p:sp>
+      <p:sp>
+        <p:nvSpPr>
+          <p:cNvPr id="49" name="C3-E13 text 47" descr="sci-ppt:o047"/>
           <p:cNvSpPr txBox="1"/>
           <p:nvPr/>
         </p:nvSpPr>
         <p:spPr>
           <a:xfrm>
-            <a:off x="7863840" y="1188720"/>
-            <a:ext cx="2743200" cy="365760"/>
+            <a:off x="7516367" y="969264"/>
+            <a:ext cx="4215383" cy="247142"/>
           </a:xfrm>
           <a:prstGeom prst="rect">
             <a:avLst/>
@@ -3384,7 +4306,7 @@
           <a:effectLst/>
         </p:spPr>
         <p:txBody>
-          <a:bodyPr wrap="square" lIns="27432" rIns="27432" tIns="18288" bIns="18288" anchor="ctr">
+          <a:bodyPr wrap="none" lIns="18288" rIns="18288" tIns="18288" bIns="18288" anchor="t">
             <a:spAutoFit/>
           </a:bodyPr>
           <a:lstStyle/>
@@ -3395,39 +4317,55 @@
               </a:spcAft>
             </a:pPr>
             <a:r>
-              <a:rPr sz="1700" b="0" i="0">
+              <a:rPr sz="1300" b="1" i="0">
+                <a:solidFill>
+                  <a:srgbClr val="8EDBD4"/>
+                </a:solidFill>
+                <a:latin typeface="Arial"/>
+              </a:rPr>
+              <a:t>Geometry enters through Ω and its boundary</a:t>
+            </a:r>
+          </a:p>
+        </p:txBody>
+      </p:sp>
+      <p:sp>
+        <p:nvSpPr>
+          <p:cNvPr id="50" name="C3-E13 text 48" descr="sci-ppt:o048"/>
+          <p:cNvSpPr txBox="1"/>
+          <p:nvPr/>
+        </p:nvSpPr>
+        <p:spPr>
+          <a:xfrm>
+            <a:off x="7543800" y="1417320"/>
+            <a:ext cx="4206240" cy="433070"/>
+          </a:xfrm>
+          <a:prstGeom prst="rect">
+            <a:avLst/>
+          </a:prstGeom>
+          <a:noFill/>
+          <a:effectLst/>
+        </p:spPr>
+        <p:txBody>
+          <a:bodyPr wrap="none" lIns="18288" rIns="18288" tIns="18288" bIns="18288" anchor="t">
+            <a:spAutoFit/>
+          </a:bodyPr>
+          <a:lstStyle/>
+          <a:p>
+            <a:pPr algn="l">
+              <a:spcAft>
+                <a:spcPts val="0"/>
+              </a:spcAft>
+            </a:pPr>
+            <a:r>
+              <a:rPr sz="1250" b="0" i="0">
                 <a:solidFill>
                   <a:srgbClr val="E7F0F3"/>
                 </a:solidFill>
                 <a:latin typeface="Arial"/>
               </a:rPr>
-              <a:t>Outlet / meniscus</a:t>
-            </a:r>
-          </a:p>
-        </p:txBody>
-      </p:sp>
-      <p:sp>
-        <p:nvSpPr>
-          <p:cNvPr id="11" name="C3-E13 text 9" descr="sci-ppt:o009"/>
-          <p:cNvSpPr txBox="1"/>
-          <p:nvPr/>
-        </p:nvSpPr>
-        <p:spPr>
-          <a:xfrm>
-            <a:off x="1005840" y="594360"/>
-            <a:ext cx="10058400" cy="365760"/>
-          </a:xfrm>
-          <a:prstGeom prst="rect">
-            <a:avLst/>
-          </a:prstGeom>
-          <a:noFill/>
-          <a:effectLst/>
-        </p:spPr>
-        <p:txBody>
-          <a:bodyPr wrap="square" lIns="27432" rIns="27432" tIns="18288" bIns="18288" anchor="ctr">
-            <a:spAutoFit/>
-          </a:bodyPr>
-          <a:lstStyle/>
+              <a:t>Irrotational, incompressible flow reduces to one</a:t>
+            </a:r>
+          </a:p>
           <a:p>
             <a:pPr algn="l">
               <a:spcAft>
@@ -3435,49 +4373,27 @@
               </a:spcAft>
             </a:pPr>
             <a:r>
-              <a:rPr sz="1800" b="0" i="0">
+              <a:rPr sz="1250" b="0" i="0">
                 <a:solidFill>
-                  <a:srgbClr val="8EDBD4"/>
+                  <a:srgbClr val="E7F0F3"/>
                 </a:solidFill>
                 <a:latin typeface="Arial"/>
               </a:rPr>
-              <a:t>Walls, cavity and outlet are distinct boundaries.</a:t>
-            </a:r>
-          </a:p>
-        </p:txBody>
-      </p:sp>
-      <p:cxnSp>
-        <p:nvCxnSpPr>
-          <p:cNvPr id="12" name="C3-E13 line 10" descr="sci-ppt:o010"/>
-          <p:cNvCxnSpPr/>
-          <p:nvPr/>
-        </p:nvCxnSpPr>
-        <p:spPr>
-          <a:xfrm>
-            <a:off x="274320" y="3977639"/>
-            <a:ext cx="11612880" cy="0"/>
-          </a:xfrm>
-          <a:prstGeom prst="line">
-            <a:avLst/>
-          </a:prstGeom>
-          <a:ln w="12700">
-            <a:solidFill>
-              <a:srgbClr val="405967"/>
-            </a:solidFill>
-          </a:ln>
-          <a:effectLst/>
-        </p:spPr>
-      </p:cxnSp>
-      <p:sp>
-        <p:nvSpPr>
-          <p:cNvPr id="13" name="C3-E13 text 11" descr="sci-ppt:o011"/>
+              <a:t>scalar equation:</a:t>
+            </a:r>
+          </a:p>
+        </p:txBody>
+      </p:sp>
+      <p:sp>
+        <p:nvSpPr>
+          <p:cNvPr id="51" name="C3-E13 text 49" descr="sci-ppt:o049"/>
           <p:cNvSpPr txBox="1"/>
           <p:nvPr/>
         </p:nvSpPr>
         <p:spPr>
           <a:xfrm>
-            <a:off x="320040" y="4096512"/>
-            <a:ext cx="5715000" cy="246888"/>
+            <a:off x="7543800" y="2011680"/>
+            <a:ext cx="4206240" cy="254889"/>
           </a:xfrm>
           <a:prstGeom prst="rect">
             <a:avLst/>
@@ -3486,7 +4402,7 @@
           <a:effectLst/>
         </p:spPr>
         <p:txBody>
-          <a:bodyPr wrap="square" lIns="27432" rIns="27432" tIns="18288" bIns="18288" anchor="ctr">
+          <a:bodyPr wrap="none" lIns="18288" rIns="18288" tIns="18288" bIns="18288" anchor="t">
             <a:spAutoFit/>
           </a:bodyPr>
           <a:lstStyle/>
@@ -3497,27 +4413,27 @@
               </a:spcAft>
             </a:pPr>
             <a:r>
-              <a:rPr sz="1150" b="0" i="0">
+              <a:rPr sz="1350" b="1" i="0">
                 <a:solidFill>
-                  <a:srgbClr val="B4C7D2"/>
+                  <a:srgbClr val="F2B880"/>
                 </a:solidFill>
                 <a:latin typeface="Arial"/>
               </a:rPr>
-              <a:t>• Ω(t) liquid domain</a:t>
-            </a:r>
-          </a:p>
-        </p:txBody>
-      </p:sp>
-      <p:sp>
-        <p:nvSpPr>
-          <p:cNvPr id="14" name="C3-E13 text 12" descr="sci-ppt:o012"/>
+              <a:t>∇·u = 0  and  u = ∇φ  ⇒  ∇²φ = 0 in Ω(t)</a:t>
+            </a:r>
+          </a:p>
+        </p:txBody>
+      </p:sp>
+      <p:sp>
+        <p:nvSpPr>
+          <p:cNvPr id="52" name="C3-E13 text 50" descr="sci-ppt:o050"/>
           <p:cNvSpPr txBox="1"/>
           <p:nvPr/>
         </p:nvSpPr>
         <p:spPr>
           <a:xfrm>
-            <a:off x="6217920" y="4096512"/>
-            <a:ext cx="5715000" cy="246888"/>
+            <a:off x="7744968" y="2743200"/>
+            <a:ext cx="4005072" cy="626745"/>
           </a:xfrm>
           <a:prstGeom prst="rect">
             <a:avLst/>
@@ -3526,7 +4442,7 @@
           <a:effectLst/>
         </p:spPr>
         <p:txBody>
-          <a:bodyPr wrap="square" lIns="27432" rIns="27432" tIns="18288" bIns="18288" anchor="ctr">
+          <a:bodyPr wrap="none" lIns="18288" rIns="18288" tIns="18288" bIns="18288" anchor="t">
             <a:spAutoFit/>
           </a:bodyPr>
           <a:lstStyle/>
@@ -3537,39 +4453,15 @@
               </a:spcAft>
             </a:pPr>
             <a:r>
-              <a:rPr sz="1150" b="0" i="0">
+              <a:rPr sz="1250" b="0" i="0">
                 <a:solidFill>
-                  <a:srgbClr val="B4C7D2"/>
+                  <a:srgbClr val="E7F0F3"/>
                 </a:solidFill>
                 <a:latin typeface="Arial"/>
               </a:rPr>
-              <a:t>• φ(x,t) velocity potential</a:t>
-            </a:r>
-          </a:p>
-        </p:txBody>
-      </p:sp>
-      <p:sp>
-        <p:nvSpPr>
-          <p:cNvPr id="15" name="C3-E13 text 13" descr="sci-ppt:o013"/>
-          <p:cNvSpPr txBox="1"/>
-          <p:nvPr/>
-        </p:nvSpPr>
-        <p:spPr>
-          <a:xfrm>
-            <a:off x="320040" y="4329684"/>
-            <a:ext cx="5715000" cy="246888"/>
-          </a:xfrm>
-          <a:prstGeom prst="rect">
-            <a:avLst/>
-          </a:prstGeom>
-          <a:noFill/>
-          <a:effectLst/>
-        </p:spPr>
-        <p:txBody>
-          <a:bodyPr wrap="square" lIns="27432" rIns="27432" tIns="18288" bIns="18288" anchor="ctr">
-            <a:spAutoFit/>
-          </a:bodyPr>
-          <a:lstStyle/>
+              <a:t>Laplace has no time derivative: φ at one</a:t>
+            </a:r>
+          </a:p>
           <a:p>
             <a:pPr algn="l">
               <a:spcAft>
@@ -3577,39 +4469,15 @@
               </a:spcAft>
             </a:pPr>
             <a:r>
-              <a:rPr sz="1150" b="0" i="0">
+              <a:rPr sz="1250" b="0" i="0">
                 <a:solidFill>
-                  <a:srgbClr val="B4C7D2"/>
+                  <a:srgbClr val="E7F0F3"/>
                 </a:solidFill>
                 <a:latin typeface="Arial"/>
               </a:rPr>
-              <a:t>• u = ∇φ liquid velocity</a:t>
-            </a:r>
-          </a:p>
-        </p:txBody>
-      </p:sp>
-      <p:sp>
-        <p:nvSpPr>
-          <p:cNvPr id="16" name="C3-E13 text 14" descr="sci-ppt:o014"/>
-          <p:cNvSpPr txBox="1"/>
-          <p:nvPr/>
-        </p:nvSpPr>
-        <p:spPr>
-          <a:xfrm>
-            <a:off x="6217920" y="4329684"/>
-            <a:ext cx="5715000" cy="246888"/>
-          </a:xfrm>
-          <a:prstGeom prst="rect">
-            <a:avLst/>
-          </a:prstGeom>
-          <a:noFill/>
-          <a:effectLst/>
-        </p:spPr>
-        <p:txBody>
-          <a:bodyPr wrap="square" lIns="27432" rIns="27432" tIns="18288" bIns="18288" anchor="ctr">
-            <a:spAutoFit/>
-          </a:bodyPr>
-          <a:lstStyle/>
+              <a:t>instant follows from the shape and boundary</a:t>
+            </a:r>
+          </a:p>
           <a:p>
             <a:pPr algn="l">
               <a:spcAft>
@@ -3617,27 +4485,59 @@
               </a:spcAft>
             </a:pPr>
             <a:r>
-              <a:rPr sz="1150" b="0" i="0">
+              <a:rPr sz="1250" b="0" i="0">
                 <a:solidFill>
-                  <a:srgbClr val="B4C7D2"/>
+                  <a:srgbClr val="E7F0F3"/>
                 </a:solidFill>
                 <a:latin typeface="Arial"/>
               </a:rPr>
-              <a:t>• ∇·u = 0; ∇²φ = 0</a:t>
-            </a:r>
-          </a:p>
-        </p:txBody>
-      </p:sp>
-      <p:sp>
-        <p:nvSpPr>
-          <p:cNvPr id="17" name="C3-E13 text 15" descr="sci-ppt:o015"/>
+              <a:t>data at that instant.</a:t>
+            </a:r>
+          </a:p>
+        </p:txBody>
+      </p:sp>
+      <p:sp>
+        <p:nvSpPr>
+          <p:cNvPr id="53" name="C3-E13 ellipse 51" descr="sci-ppt:o051"/>
+          <p:cNvSpPr/>
+          <p:nvPr/>
+        </p:nvSpPr>
+        <p:spPr>
+          <a:xfrm>
+            <a:off x="7575804" y="2800477"/>
+            <a:ext cx="82296" cy="82296"/>
+          </a:xfrm>
+          <a:prstGeom prst="ellipse">
+            <a:avLst/>
+          </a:prstGeom>
+          <a:solidFill>
+            <a:srgbClr val="8EDBD4"/>
+          </a:solidFill>
+          <a:ln w="12700">
+            <a:solidFill>
+              <a:srgbClr val="8EDBD4"/>
+            </a:solidFill>
+          </a:ln>
+          <a:effectLst/>
+        </p:spPr>
+        <p:txBody>
+          <a:bodyPr rtlCol="0" anchor="ctr"/>
+          <a:lstStyle/>
+          <a:p>
+            <a:pPr algn="ctr"/>
+          </a:p>
+        </p:txBody>
+      </p:sp>
+      <p:sp>
+        <p:nvSpPr>
+          <p:cNvPr id="54" name="C3-E13 text 52" descr="sci-ppt:o052"/>
           <p:cNvSpPr txBox="1"/>
           <p:nvPr/>
         </p:nvSpPr>
         <p:spPr>
           <a:xfrm>
-            <a:off x="320040" y="4562856"/>
-            <a:ext cx="5715000" cy="246888"/>
+            <a:off x="7744968" y="3415665"/>
+            <a:ext cx="4005072" cy="433070"/>
           </a:xfrm>
           <a:prstGeom prst="rect">
             <a:avLst/>
@@ -3646,7 +4546,7 @@
           <a:effectLst/>
         </p:spPr>
         <p:txBody>
-          <a:bodyPr wrap="square" lIns="27432" rIns="27432" tIns="18288" bIns="18288" anchor="ctr">
+          <a:bodyPr wrap="none" lIns="18288" rIns="18288" tIns="18288" bIns="18288" anchor="t">
             <a:spAutoFit/>
           </a:bodyPr>
           <a:lstStyle/>
@@ -3657,39 +4557,15 @@
               </a:spcAft>
             </a:pPr>
             <a:r>
-              <a:rPr sz="1150" b="0" i="0">
+              <a:rPr sz="1250" b="0" i="0">
                 <a:solidFill>
-                  <a:srgbClr val="B4C7D2"/>
+                  <a:srgbClr val="E7F0F3"/>
                 </a:solidFill>
                 <a:latin typeface="Arial"/>
               </a:rPr>
-              <a:t>• x spatial point; t event time</a:t>
-            </a:r>
-          </a:p>
-        </p:txBody>
-      </p:sp>
-      <p:sp>
-        <p:nvSpPr>
-          <p:cNvPr id="18" name="C3-E13 text 16" descr="sci-ppt:o016"/>
-          <p:cNvSpPr txBox="1"/>
-          <p:nvPr/>
-        </p:nvSpPr>
-        <p:spPr>
-          <a:xfrm>
-            <a:off x="320040" y="5596128"/>
-            <a:ext cx="11430000" cy="292608"/>
-          </a:xfrm>
-          <a:prstGeom prst="rect">
-            <a:avLst/>
-          </a:prstGeom>
-          <a:noFill/>
-          <a:effectLst/>
-        </p:spPr>
-        <p:txBody>
-          <a:bodyPr wrap="square" lIns="27432" rIns="27432" tIns="18288" bIns="18288" anchor="ctr">
-            <a:spAutoFit/>
-          </a:bodyPr>
-          <a:lstStyle/>
+              <a:t>The domain Ω(t) changes with the moving</a:t>
+            </a:r>
+          </a:p>
           <a:p>
             <a:pPr algn="l">
               <a:spcAft>
@@ -3697,27 +4573,59 @@
               </a:spcAft>
             </a:pPr>
             <a:r>
-              <a:rPr sz="1150" b="0" i="0">
+              <a:rPr sz="1250" b="0" i="0">
                 <a:solidFill>
-                  <a:srgbClr val="8EDBD4"/>
+                  <a:srgbClr val="E7F0F3"/>
                 </a:solidFill>
                 <a:latin typeface="Arial"/>
               </a:rPr>
-              <a:t>Actual meniscus and bubble surfaces are separate boundaries</a:t>
-            </a:r>
-          </a:p>
-        </p:txBody>
-      </p:sp>
-      <p:sp>
-        <p:nvSpPr>
-          <p:cNvPr id="19" name="C3-E13 text 17" descr="sci-ppt:o017"/>
+              <a:t>interface, so geometry drives the dynamics.</a:t>
+            </a:r>
+          </a:p>
+        </p:txBody>
+      </p:sp>
+      <p:sp>
+        <p:nvSpPr>
+          <p:cNvPr id="55" name="C3-E13 ellipse 53" descr="sci-ppt:o053"/>
+          <p:cNvSpPr/>
+          <p:nvPr/>
+        </p:nvSpPr>
+        <p:spPr>
+          <a:xfrm>
+            <a:off x="7575804" y="3472942"/>
+            <a:ext cx="82296" cy="82296"/>
+          </a:xfrm>
+          <a:prstGeom prst="ellipse">
+            <a:avLst/>
+          </a:prstGeom>
+          <a:solidFill>
+            <a:srgbClr val="8EDBD4"/>
+          </a:solidFill>
+          <a:ln w="12700">
+            <a:solidFill>
+              <a:srgbClr val="8EDBD4"/>
+            </a:solidFill>
+          </a:ln>
+          <a:effectLst/>
+        </p:spPr>
+        <p:txBody>
+          <a:bodyPr rtlCol="0" anchor="ctr"/>
+          <a:lstStyle/>
+          <a:p>
+            <a:pPr algn="ctr"/>
+          </a:p>
+        </p:txBody>
+      </p:sp>
+      <p:sp>
+        <p:nvSpPr>
+          <p:cNvPr id="56" name="C3-E13 text 54" descr="sci-ppt:o054"/>
           <p:cNvSpPr txBox="1"/>
           <p:nvPr/>
         </p:nvSpPr>
         <p:spPr>
           <a:xfrm>
-            <a:off x="320040" y="5870448"/>
-            <a:ext cx="11430000" cy="292608"/>
+            <a:off x="7744968" y="3894455"/>
+            <a:ext cx="4005072" cy="433070"/>
           </a:xfrm>
           <a:prstGeom prst="rect">
             <a:avLst/>
@@ -3726,7 +4634,7 @@
           <a:effectLst/>
         </p:spPr>
         <p:txBody>
-          <a:bodyPr wrap="square" lIns="27432" rIns="27432" tIns="18288" bIns="18288" anchor="ctr">
+          <a:bodyPr wrap="none" lIns="18288" rIns="18288" tIns="18288" bIns="18288" anchor="t">
             <a:spAutoFit/>
           </a:bodyPr>
           <a:lstStyle/>
@@ -3737,27 +4645,75 @@
               </a:spcAft>
             </a:pPr>
             <a:r>
-              <a:rPr sz="1150" b="0" i="0">
+              <a:rPr sz="1250" b="0" i="0">
                 <a:solidFill>
-                  <a:srgbClr val="8EDBD4"/>
+                  <a:srgbClr val="E7F0F3"/>
                 </a:solidFill>
                 <a:latin typeface="Arial"/>
               </a:rPr>
-              <a:t>Zero vorticity and negligible bulk viscosity assumed</a:t>
-            </a:r>
-          </a:p>
-        </p:txBody>
-      </p:sp>
-      <p:sp>
-        <p:nvSpPr>
-          <p:cNvPr id="20" name="C3-E13 text 18" descr="sci-ppt:o018"/>
+              <a:t>The equation alone predicts nothing without</a:t>
+            </a:r>
+          </a:p>
+          <a:p>
+            <a:pPr algn="l">
+              <a:spcAft>
+                <a:spcPts val="0"/>
+              </a:spcAft>
+            </a:pPr>
+            <a:r>
+              <a:rPr sz="1250" b="0" i="0">
+                <a:solidFill>
+                  <a:srgbClr val="E7F0F3"/>
+                </a:solidFill>
+                <a:latin typeface="Arial"/>
+              </a:rPr>
+              <a:t>boundary conditions (next figure).</a:t>
+            </a:r>
+          </a:p>
+        </p:txBody>
+      </p:sp>
+      <p:sp>
+        <p:nvSpPr>
+          <p:cNvPr id="57" name="C3-E13 ellipse 55" descr="sci-ppt:o055"/>
+          <p:cNvSpPr/>
+          <p:nvPr/>
+        </p:nvSpPr>
+        <p:spPr>
+          <a:xfrm>
+            <a:off x="7575804" y="3951732"/>
+            <a:ext cx="82296" cy="82296"/>
+          </a:xfrm>
+          <a:prstGeom prst="ellipse">
+            <a:avLst/>
+          </a:prstGeom>
+          <a:solidFill>
+            <a:srgbClr val="8EDBD4"/>
+          </a:solidFill>
+          <a:ln w="12700">
+            <a:solidFill>
+              <a:srgbClr val="8EDBD4"/>
+            </a:solidFill>
+          </a:ln>
+          <a:effectLst/>
+        </p:spPr>
+        <p:txBody>
+          <a:bodyPr rtlCol="0" anchor="ctr"/>
+          <a:lstStyle/>
+          <a:p>
+            <a:pPr algn="ctr"/>
+          </a:p>
+        </p:txBody>
+      </p:sp>
+      <p:sp>
+        <p:nvSpPr>
+          <p:cNvPr id="58" name="C3-E13 text 56" descr="sci-ppt:o056"/>
           <p:cNvSpPr txBox="1"/>
           <p:nvPr/>
         </p:nvSpPr>
         <p:spPr>
           <a:xfrm>
-            <a:off x="320040" y="6473952"/>
-            <a:ext cx="11430000" cy="256032"/>
+            <a:off x="320040" y="6510528"/>
+            <a:ext cx="11521440" cy="200660"/>
           </a:xfrm>
           <a:prstGeom prst="rect">
             <a:avLst/>
@@ -3766,7 +4722,7 @@
           <a:effectLst/>
         </p:spPr>
         <p:txBody>
-          <a:bodyPr wrap="square" lIns="27432" rIns="27432" tIns="18288" bIns="18288" anchor="ctr">
+          <a:bodyPr wrap="none" lIns="18288" rIns="18288" tIns="18288" bIns="18288" anchor="t">
             <a:spAutoFit/>
           </a:bodyPr>
           <a:lstStyle/>
@@ -3783,7 +4739,7 @@
                 </a:solidFill>
                 <a:latin typeface="Arial"/>
               </a:rPr>
-              <a:t>Model schematic; geometry is not to scale.</a:t>
+              <a:t>Potential-flow reduction of Eq. C3-E13; schematic.</a:t>
             </a:r>
           </a:p>
         </p:txBody>
